--- a/bkup/Channels/ほたてまだこ/サムネイル_Horror.pptx
+++ b/bkup/Channels/ほたてまだこ/サムネイル_Horror.pptx
@@ -4545,7 +4545,7 @@
                   </a:glow>
                 </a:effectLst>
               </a:rPr>
-              <a:t>私</a:t>
+              <a:t>家</a:t>
             </a:r>
             <a:r>
               <a:rPr lang="ja-JP" altLang="en-US" sz="12500" b="1" spc="-2000" dirty="0">
@@ -4566,7 +4566,49 @@
                   </a:glow>
                 </a:effectLst>
               </a:rPr>
-              <a:t>も</a:t>
+              <a:t>の</a:t>
+            </a:r>
+            <a:r>
+              <a:rPr lang="ja-JP" altLang="en-US" sz="15000" b="1" spc="-2000" dirty="0">
+                <a:gradFill>
+                  <a:gsLst>
+                    <a:gs pos="0">
+                      <a:srgbClr val="FF0000"/>
+                    </a:gs>
+                    <a:gs pos="100000">
+                      <a:srgbClr val="000000"/>
+                    </a:gs>
+                  </a:gsLst>
+                  <a:lin ang="5400000" scaled="1"/>
+                </a:gradFill>
+                <a:effectLst>
+                  <a:glow rad="317500">
+                    <a:schemeClr val="tx1"/>
+                  </a:glow>
+                </a:effectLst>
+              </a:rPr>
+              <a:t>中</a:t>
+            </a:r>
+            <a:r>
+              <a:rPr lang="ja-JP" altLang="en-US" sz="12500" b="1" spc="-2000" dirty="0">
+                <a:gradFill>
+                  <a:gsLst>
+                    <a:gs pos="0">
+                      <a:srgbClr val="FF0000"/>
+                    </a:gs>
+                    <a:gs pos="100000">
+                      <a:srgbClr val="000000"/>
+                    </a:gs>
+                  </a:gsLst>
+                  <a:lin ang="5400000" scaled="1"/>
+                </a:gradFill>
+                <a:effectLst>
+                  <a:glow rad="317500">
+                    <a:schemeClr val="tx1"/>
+                  </a:glow>
+                </a:effectLst>
+              </a:rPr>
+              <a:t>に</a:t>
             </a:r>
             <a:r>
               <a:rPr lang="ja-JP" altLang="en-US" sz="15000" b="1" spc="-2000" dirty="0">
@@ -4680,6 +4722,151 @@
           <a:chExt cx="0" cy="0"/>
         </a:xfrm>
       </p:grpSpPr>
+      <p:sp>
+        <p:nvSpPr>
+          <p:cNvPr id="5" name="正方形/長方形 4">
+            <a:extLst>
+              <a:ext uri="{FF2B5EF4-FFF2-40B4-BE49-F238E27FC236}">
+                <a16:creationId xmlns:a16="http://schemas.microsoft.com/office/drawing/2014/main" id="{C2F83F9E-EC1C-D2D9-6E2E-004D3D231C85}"/>
+              </a:ext>
+            </a:extLst>
+          </p:cNvPr>
+          <p:cNvSpPr>
+            <a:spLocks/>
+          </p:cNvSpPr>
+          <p:nvPr/>
+        </p:nvSpPr>
+        <p:spPr>
+          <a:xfrm flipH="1">
+            <a:off x="-1" y="4214948"/>
+            <a:ext cx="12191999" cy="2643051"/>
+          </a:xfrm>
+          <a:prstGeom prst="rect">
+            <a:avLst/>
+          </a:prstGeom>
+          <a:noFill/>
+          <a:ln>
+            <a:noFill/>
+          </a:ln>
+        </p:spPr>
+        <p:style>
+          <a:lnRef idx="2">
+            <a:schemeClr val="accent1">
+              <a:shade val="15000"/>
+            </a:schemeClr>
+          </a:lnRef>
+          <a:fillRef idx="1">
+            <a:schemeClr val="accent1"/>
+          </a:fillRef>
+          <a:effectRef idx="0">
+            <a:schemeClr val="accent1"/>
+          </a:effectRef>
+          <a:fontRef idx="minor">
+            <a:schemeClr val="lt1"/>
+          </a:fontRef>
+        </p:style>
+        <p:txBody>
+          <a:bodyPr rtlCol="0" anchor="ctr"/>
+          <a:lstStyle/>
+          <a:p>
+            <a:pPr algn="ctr"/>
+            <a:r>
+              <a:rPr lang="ja-JP" altLang="en-US" sz="15000" b="1" spc="-2000" dirty="0">
+                <a:gradFill>
+                  <a:gsLst>
+                    <a:gs pos="0">
+                      <a:srgbClr val="FF0000"/>
+                    </a:gs>
+                    <a:gs pos="100000">
+                      <a:srgbClr val="000000"/>
+                    </a:gs>
+                  </a:gsLst>
+                  <a:lin ang="5400000" scaled="1"/>
+                </a:gradFill>
+                <a:effectLst>
+                  <a:glow rad="317500">
+                    <a:schemeClr val="tx1"/>
+                  </a:glow>
+                </a:effectLst>
+              </a:rPr>
+              <a:t>捕</a:t>
+            </a:r>
+            <a:r>
+              <a:rPr lang="ja-JP" altLang="en-US" sz="12500" b="1" spc="-2000" dirty="0">
+                <a:gradFill>
+                  <a:gsLst>
+                    <a:gs pos="0">
+                      <a:srgbClr val="FF0000"/>
+                    </a:gs>
+                    <a:gs pos="100000">
+                      <a:srgbClr val="000000"/>
+                    </a:gs>
+                  </a:gsLst>
+                  <a:lin ang="5400000" scaled="1"/>
+                </a:gradFill>
+                <a:effectLst>
+                  <a:glow rad="317500">
+                    <a:schemeClr val="tx1"/>
+                  </a:glow>
+                </a:effectLst>
+              </a:rPr>
+              <a:t>まったら</a:t>
+            </a:r>
+            <a:r>
+              <a:rPr lang="ja-JP" altLang="en-US" sz="15000" b="1" spc="-2000" dirty="0">
+                <a:gradFill>
+                  <a:gsLst>
+                    <a:gs pos="0">
+                      <a:srgbClr val="FF0000"/>
+                    </a:gs>
+                    <a:gs pos="100000">
+                      <a:srgbClr val="000000"/>
+                    </a:gs>
+                  </a:gsLst>
+                  <a:lin ang="5400000" scaled="1"/>
+                </a:gradFill>
+                <a:effectLst>
+                  <a:glow rad="317500">
+                    <a:schemeClr val="tx1"/>
+                  </a:glow>
+                </a:effectLst>
+              </a:rPr>
+              <a:t>終</a:t>
+            </a:r>
+            <a:r>
+              <a:rPr lang="ja-JP" altLang="en-US" sz="12500" b="1" spc="-2000" dirty="0">
+                <a:gradFill>
+                  <a:gsLst>
+                    <a:gs pos="0">
+                      <a:srgbClr val="FF0000"/>
+                    </a:gs>
+                    <a:gs pos="100000">
+                      <a:srgbClr val="000000"/>
+                    </a:gs>
+                  </a:gsLst>
+                  <a:lin ang="5400000" scaled="1"/>
+                </a:gradFill>
+                <a:effectLst>
+                  <a:glow rad="317500">
+                    <a:schemeClr val="tx1"/>
+                  </a:glow>
+                </a:effectLst>
+              </a:rPr>
+              <a:t>わり</a:t>
+            </a:r>
+            <a:endParaRPr lang="en-US" altLang="ja-JP" sz="15000" b="1" spc="-2000" dirty="0">
+              <a:solidFill>
+                <a:schemeClr val="bg1"/>
+              </a:solidFill>
+              <a:effectLst>
+                <a:glow rad="317500">
+                  <a:schemeClr val="tx1"/>
+                </a:glow>
+              </a:effectLst>
+            </a:endParaRPr>
+          </a:p>
+        </p:txBody>
+      </p:sp>
     </p:spTree>
     <p:extLst>
       <p:ext uri="{BB962C8B-B14F-4D97-AF65-F5344CB8AC3E}">

--- a/bkup/Channels/ほたてまだこ/サムネイル_Horror.pptx
+++ b/bkup/Channels/ほたてまだこ/サムネイル_Horror.pptx
@@ -9,8 +9,8 @@
   </p:notesMasterIdLst>
   <p:sldIdLst>
     <p:sldId id="342" r:id="rId2"/>
-    <p:sldId id="343" r:id="rId3"/>
-    <p:sldId id="344" r:id="rId4"/>
+    <p:sldId id="344" r:id="rId3"/>
+    <p:sldId id="343" r:id="rId4"/>
     <p:sldId id="345" r:id="rId5"/>
   </p:sldIdLst>
   <p:sldSz cx="12192000" cy="6858000"/>
@@ -200,7 +200,7 @@
           <a:p>
             <a:fld id="{A959942B-8696-43E6-9863-29C6AA159A67}" type="datetimeFigureOut">
               <a:rPr kumimoji="1" lang="ja-JP" altLang="en-US" smtClean="0"/>
-              <a:t>2026/9/21</a:t>
+              <a:t>2026/9/22</a:t>
             </a:fld>
             <a:endParaRPr kumimoji="1" lang="ja-JP" altLang="en-US"/>
           </a:p>
@@ -646,7 +646,7 @@
           <a:p>
             <a:fld id="{2A9B0214-79D3-4E95-9DDD-2C987CD5BC3E}" type="datetimeFigureOut">
               <a:rPr kumimoji="1" lang="ja-JP" altLang="en-US" smtClean="0"/>
-              <a:t>2026/9/21</a:t>
+              <a:t>2026/9/22</a:t>
             </a:fld>
             <a:endParaRPr kumimoji="1" lang="ja-JP" altLang="en-US"/>
           </a:p>
@@ -876,7 +876,7 @@
           <a:p>
             <a:fld id="{2A9B0214-79D3-4E95-9DDD-2C987CD5BC3E}" type="datetimeFigureOut">
               <a:rPr kumimoji="1" lang="ja-JP" altLang="en-US" smtClean="0"/>
-              <a:t>2026/9/21</a:t>
+              <a:t>2026/9/22</a:t>
             </a:fld>
             <a:endParaRPr kumimoji="1" lang="ja-JP" altLang="en-US"/>
           </a:p>
@@ -1116,7 +1116,7 @@
           <a:p>
             <a:fld id="{2A9B0214-79D3-4E95-9DDD-2C987CD5BC3E}" type="datetimeFigureOut">
               <a:rPr kumimoji="1" lang="ja-JP" altLang="en-US" smtClean="0"/>
-              <a:t>2026/9/21</a:t>
+              <a:t>2026/9/22</a:t>
             </a:fld>
             <a:endParaRPr kumimoji="1" lang="ja-JP" altLang="en-US"/>
           </a:p>
@@ -1346,7 +1346,7 @@
           <a:p>
             <a:fld id="{2A9B0214-79D3-4E95-9DDD-2C987CD5BC3E}" type="datetimeFigureOut">
               <a:rPr kumimoji="1" lang="ja-JP" altLang="en-US" smtClean="0"/>
-              <a:t>2026/9/21</a:t>
+              <a:t>2026/9/22</a:t>
             </a:fld>
             <a:endParaRPr kumimoji="1" lang="ja-JP" altLang="en-US"/>
           </a:p>
@@ -1621,7 +1621,7 @@
           <a:p>
             <a:fld id="{2A9B0214-79D3-4E95-9DDD-2C987CD5BC3E}" type="datetimeFigureOut">
               <a:rPr kumimoji="1" lang="ja-JP" altLang="en-US" smtClean="0"/>
-              <a:t>2026/9/21</a:t>
+              <a:t>2026/9/22</a:t>
             </a:fld>
             <a:endParaRPr kumimoji="1" lang="ja-JP" altLang="en-US"/>
           </a:p>
@@ -1950,7 +1950,7 @@
           <a:p>
             <a:fld id="{2A9B0214-79D3-4E95-9DDD-2C987CD5BC3E}" type="datetimeFigureOut">
               <a:rPr kumimoji="1" lang="ja-JP" altLang="en-US" smtClean="0"/>
-              <a:t>2026/9/21</a:t>
+              <a:t>2026/9/22</a:t>
             </a:fld>
             <a:endParaRPr kumimoji="1" lang="ja-JP" altLang="en-US"/>
           </a:p>
@@ -2426,7 +2426,7 @@
           <a:p>
             <a:fld id="{2A9B0214-79D3-4E95-9DDD-2C987CD5BC3E}" type="datetimeFigureOut">
               <a:rPr kumimoji="1" lang="ja-JP" altLang="en-US" smtClean="0"/>
-              <a:t>2026/9/21</a:t>
+              <a:t>2026/9/22</a:t>
             </a:fld>
             <a:endParaRPr kumimoji="1" lang="ja-JP" altLang="en-US"/>
           </a:p>
@@ -2567,7 +2567,7 @@
           <a:p>
             <a:fld id="{2A9B0214-79D3-4E95-9DDD-2C987CD5BC3E}" type="datetimeFigureOut">
               <a:rPr kumimoji="1" lang="ja-JP" altLang="en-US" smtClean="0"/>
-              <a:t>2026/9/21</a:t>
+              <a:t>2026/9/22</a:t>
             </a:fld>
             <a:endParaRPr kumimoji="1" lang="ja-JP" altLang="en-US"/>
           </a:p>
@@ -2680,7 +2680,7 @@
           <a:p>
             <a:fld id="{2A9B0214-79D3-4E95-9DDD-2C987CD5BC3E}" type="datetimeFigureOut">
               <a:rPr kumimoji="1" lang="ja-JP" altLang="en-US" smtClean="0"/>
-              <a:t>2026/9/21</a:t>
+              <a:t>2026/9/22</a:t>
             </a:fld>
             <a:endParaRPr kumimoji="1" lang="ja-JP" altLang="en-US"/>
           </a:p>
@@ -3023,7 +3023,7 @@
           <a:p>
             <a:fld id="{2A9B0214-79D3-4E95-9DDD-2C987CD5BC3E}" type="datetimeFigureOut">
               <a:rPr kumimoji="1" lang="ja-JP" altLang="en-US" smtClean="0"/>
-              <a:t>2026/9/21</a:t>
+              <a:t>2026/9/22</a:t>
             </a:fld>
             <a:endParaRPr kumimoji="1" lang="ja-JP" altLang="en-US"/>
           </a:p>
@@ -3311,7 +3311,7 @@
           <a:p>
             <a:fld id="{2A9B0214-79D3-4E95-9DDD-2C987CD5BC3E}" type="datetimeFigureOut">
               <a:rPr kumimoji="1" lang="ja-JP" altLang="en-US" smtClean="0"/>
-              <a:t>2026/9/21</a:t>
+              <a:t>2026/9/22</a:t>
             </a:fld>
             <a:endParaRPr kumimoji="1" lang="ja-JP" altLang="en-US"/>
           </a:p>
@@ -3584,7 +3584,7 @@
           <a:p>
             <a:fld id="{2A9B0214-79D3-4E95-9DDD-2C987CD5BC3E}" type="datetimeFigureOut">
               <a:rPr kumimoji="1" lang="ja-JP" altLang="en-US" smtClean="0"/>
-              <a:t>2026/9/21</a:t>
+              <a:t>2026/9/22</a:t>
             </a:fld>
             <a:endParaRPr kumimoji="1" lang="ja-JP" altLang="en-US"/>
           </a:p>
@@ -4315,7 +4315,7 @@
         <p:cNvPr id="1" name="">
           <a:extLst>
             <a:ext uri="{FF2B5EF4-FFF2-40B4-BE49-F238E27FC236}">
-              <a16:creationId xmlns:a16="http://schemas.microsoft.com/office/drawing/2014/main" id="{271AC7B8-03AC-F27D-E174-07DC4C455004}"/>
+              <a16:creationId xmlns:a16="http://schemas.microsoft.com/office/drawing/2014/main" id="{29997A6A-0C76-521E-3B8B-3B40CBAB9D8C}"/>
             </a:ext>
           </a:extLst>
         </p:cNvPr>
@@ -4332,10 +4332,10 @@
       </p:grpSpPr>
       <p:pic>
         <p:nvPicPr>
-          <p:cNvPr id="3" name="図 2">
-            <a:extLst>
-              <a:ext uri="{FF2B5EF4-FFF2-40B4-BE49-F238E27FC236}">
-                <a16:creationId xmlns:a16="http://schemas.microsoft.com/office/drawing/2014/main" id="{5771E54B-019F-1E9E-DE10-7EE91EF73F54}"/>
+          <p:cNvPr id="12" name="図 11">
+            <a:extLst>
+              <a:ext uri="{FF2B5EF4-FFF2-40B4-BE49-F238E27FC236}">
+                <a16:creationId xmlns:a16="http://schemas.microsoft.com/office/drawing/2014/main" id="{729E9CB3-5CCD-CED1-56F4-80C2165527F3}"/>
               </a:ext>
             </a:extLst>
           </p:cNvPr>
@@ -4346,14 +4346,14 @@
         </p:nvPicPr>
         <p:blipFill>
           <a:blip r:embed="rId2"/>
-          <a:srcRect t="5310" r="11746" b="6111"/>
+          <a:srcRect l="34001" t="23381" r="33999" b="43646"/>
           <a:stretch>
             <a:fillRect/>
           </a:stretch>
         </p:blipFill>
         <p:spPr>
           <a:xfrm>
-            <a:off x="0" y="0"/>
+            <a:off x="1" y="0"/>
             <a:ext cx="12192000" cy="6858000"/>
           </a:xfrm>
           <a:prstGeom prst="rect">
@@ -4361,12 +4361,157 @@
           </a:prstGeom>
         </p:spPr>
       </p:pic>
+      <p:sp>
+        <p:nvSpPr>
+          <p:cNvPr id="5" name="正方形/長方形 4">
+            <a:extLst>
+              <a:ext uri="{FF2B5EF4-FFF2-40B4-BE49-F238E27FC236}">
+                <a16:creationId xmlns:a16="http://schemas.microsoft.com/office/drawing/2014/main" id="{C2F83F9E-EC1C-D2D9-6E2E-004D3D231C85}"/>
+              </a:ext>
+            </a:extLst>
+          </p:cNvPr>
+          <p:cNvSpPr>
+            <a:spLocks/>
+          </p:cNvSpPr>
+          <p:nvPr/>
+        </p:nvSpPr>
+        <p:spPr>
+          <a:xfrm flipH="1">
+            <a:off x="-1" y="4214948"/>
+            <a:ext cx="12191999" cy="2643051"/>
+          </a:xfrm>
+          <a:prstGeom prst="rect">
+            <a:avLst/>
+          </a:prstGeom>
+          <a:noFill/>
+          <a:ln>
+            <a:noFill/>
+          </a:ln>
+        </p:spPr>
+        <p:style>
+          <a:lnRef idx="2">
+            <a:schemeClr val="accent1">
+              <a:shade val="15000"/>
+            </a:schemeClr>
+          </a:lnRef>
+          <a:fillRef idx="1">
+            <a:schemeClr val="accent1"/>
+          </a:fillRef>
+          <a:effectRef idx="0">
+            <a:schemeClr val="accent1"/>
+          </a:effectRef>
+          <a:fontRef idx="minor">
+            <a:schemeClr val="lt1"/>
+          </a:fontRef>
+        </p:style>
+        <p:txBody>
+          <a:bodyPr rtlCol="0" anchor="ctr"/>
+          <a:lstStyle/>
+          <a:p>
+            <a:pPr algn="ctr"/>
+            <a:r>
+              <a:rPr lang="ja-JP" altLang="en-US" sz="15000" b="1" spc="-2000" dirty="0">
+                <a:gradFill>
+                  <a:gsLst>
+                    <a:gs pos="0">
+                      <a:srgbClr val="FF0000"/>
+                    </a:gs>
+                    <a:gs pos="100000">
+                      <a:srgbClr val="000000"/>
+                    </a:gs>
+                  </a:gsLst>
+                  <a:lin ang="5400000" scaled="1"/>
+                </a:gradFill>
+                <a:effectLst>
+                  <a:glow rad="317500">
+                    <a:schemeClr val="tx1"/>
+                  </a:glow>
+                </a:effectLst>
+              </a:rPr>
+              <a:t>捕</a:t>
+            </a:r>
+            <a:r>
+              <a:rPr lang="ja-JP" altLang="en-US" sz="12500" b="1" spc="-2000" dirty="0">
+                <a:gradFill>
+                  <a:gsLst>
+                    <a:gs pos="0">
+                      <a:srgbClr val="FF0000"/>
+                    </a:gs>
+                    <a:gs pos="100000">
+                      <a:srgbClr val="000000"/>
+                    </a:gs>
+                  </a:gsLst>
+                  <a:lin ang="5400000" scaled="1"/>
+                </a:gradFill>
+                <a:effectLst>
+                  <a:glow rad="317500">
+                    <a:schemeClr val="tx1"/>
+                  </a:glow>
+                </a:effectLst>
+              </a:rPr>
+              <a:t>まったら</a:t>
+            </a:r>
+            <a:r>
+              <a:rPr lang="ja-JP" altLang="en-US" sz="15000" b="1" spc="-2000" dirty="0">
+                <a:gradFill>
+                  <a:gsLst>
+                    <a:gs pos="0">
+                      <a:srgbClr val="FF0000"/>
+                    </a:gs>
+                    <a:gs pos="100000">
+                      <a:srgbClr val="000000"/>
+                    </a:gs>
+                  </a:gsLst>
+                  <a:lin ang="5400000" scaled="1"/>
+                </a:gradFill>
+                <a:effectLst>
+                  <a:glow rad="317500">
+                    <a:schemeClr val="tx1"/>
+                  </a:glow>
+                </a:effectLst>
+              </a:rPr>
+              <a:t>終</a:t>
+            </a:r>
+            <a:r>
+              <a:rPr lang="ja-JP" altLang="en-US" sz="12500" b="1" spc="-2000" dirty="0">
+                <a:gradFill>
+                  <a:gsLst>
+                    <a:gs pos="0">
+                      <a:srgbClr val="FF0000"/>
+                    </a:gs>
+                    <a:gs pos="100000">
+                      <a:srgbClr val="000000"/>
+                    </a:gs>
+                  </a:gsLst>
+                  <a:lin ang="5400000" scaled="1"/>
+                </a:gradFill>
+                <a:effectLst>
+                  <a:glow rad="317500">
+                    <a:schemeClr val="tx1"/>
+                  </a:glow>
+                </a:effectLst>
+              </a:rPr>
+              <a:t>わり</a:t>
+            </a:r>
+            <a:endParaRPr lang="en-US" altLang="ja-JP" sz="15000" b="1" spc="-2000" dirty="0">
+              <a:solidFill>
+                <a:schemeClr val="bg1"/>
+              </a:solidFill>
+              <a:effectLst>
+                <a:glow rad="317500">
+                  <a:schemeClr val="tx1"/>
+                </a:glow>
+              </a:effectLst>
+            </a:endParaRPr>
+          </a:p>
+        </p:txBody>
+      </p:sp>
       <p:pic>
         <p:nvPicPr>
-          <p:cNvPr id="5" name="グラフィックス 4" descr="しぶき">
-            <a:extLst>
-              <a:ext uri="{FF2B5EF4-FFF2-40B4-BE49-F238E27FC236}">
-                <a16:creationId xmlns:a16="http://schemas.microsoft.com/office/drawing/2014/main" id="{6DD14828-8AC5-C338-2651-E6721430B523}"/>
+          <p:cNvPr id="14" name="グラフィックス 13" descr="しぶき">
+            <a:extLst>
+              <a:ext uri="{FF2B5EF4-FFF2-40B4-BE49-F238E27FC236}">
+                <a16:creationId xmlns:a16="http://schemas.microsoft.com/office/drawing/2014/main" id="{61449695-904E-734B-1D64-FBADFC01D33D}"/>
               </a:ext>
             </a:extLst>
           </p:cNvPr>
@@ -4404,10 +4549,10 @@
       </p:pic>
       <p:sp>
         <p:nvSpPr>
-          <p:cNvPr id="7" name="正方形/長方形 6">
-            <a:extLst>
-              <a:ext uri="{FF2B5EF4-FFF2-40B4-BE49-F238E27FC236}">
-                <a16:creationId xmlns:a16="http://schemas.microsoft.com/office/drawing/2014/main" id="{AD2C023D-CB25-62D6-D62A-CACDF01FBCDA}"/>
+          <p:cNvPr id="16" name="正方形/長方形 15">
+            <a:extLst>
+              <a:ext uri="{FF2B5EF4-FFF2-40B4-BE49-F238E27FC236}">
+                <a16:creationId xmlns:a16="http://schemas.microsoft.com/office/drawing/2014/main" id="{C721A63C-D955-35C7-3CCA-5F39AEF2E1E7}"/>
               </a:ext>
             </a:extLst>
           </p:cNvPr>
@@ -4478,6 +4623,190 @@
           </a:p>
         </p:txBody>
       </p:sp>
+    </p:spTree>
+    <p:extLst>
+      <p:ext uri="{BB962C8B-B14F-4D97-AF65-F5344CB8AC3E}">
+        <p14:creationId xmlns:p14="http://schemas.microsoft.com/office/powerpoint/2010/main" val="2538605898"/>
+      </p:ext>
+    </p:extLst>
+  </p:cSld>
+  <p:clrMapOvr>
+    <a:masterClrMapping/>
+  </p:clrMapOvr>
+</p:sld>
+</file>
+
+<file path=ppt/slides/slide3.xml><?xml version="1.0" encoding="utf-8"?>
+<p:sld xmlns:a="http://schemas.openxmlformats.org/drawingml/2006/main" xmlns:r="http://schemas.openxmlformats.org/officeDocument/2006/relationships" xmlns:p="http://schemas.openxmlformats.org/presentationml/2006/main">
+  <p:cSld>
+    <p:spTree>
+      <p:nvGrpSpPr>
+        <p:cNvPr id="1" name="">
+          <a:extLst>
+            <a:ext uri="{FF2B5EF4-FFF2-40B4-BE49-F238E27FC236}">
+              <a16:creationId xmlns:a16="http://schemas.microsoft.com/office/drawing/2014/main" id="{271AC7B8-03AC-F27D-E174-07DC4C455004}"/>
+            </a:ext>
+          </a:extLst>
+        </p:cNvPr>
+        <p:cNvGrpSpPr/>
+        <p:nvPr/>
+      </p:nvGrpSpPr>
+      <p:grpSpPr>
+        <a:xfrm>
+          <a:off x="0" y="0"/>
+          <a:ext cx="0" cy="0"/>
+          <a:chOff x="0" y="0"/>
+          <a:chExt cx="0" cy="0"/>
+        </a:xfrm>
+      </p:grpSpPr>
+      <p:pic>
+        <p:nvPicPr>
+          <p:cNvPr id="8" name="図 7">
+            <a:extLst>
+              <a:ext uri="{FF2B5EF4-FFF2-40B4-BE49-F238E27FC236}">
+                <a16:creationId xmlns:a16="http://schemas.microsoft.com/office/drawing/2014/main" id="{8FC8B0FA-0733-4A09-A4C8-B140699F3307}"/>
+              </a:ext>
+            </a:extLst>
+          </p:cNvPr>
+          <p:cNvPicPr>
+            <a:picLocks noChangeAspect="1"/>
+          </p:cNvPicPr>
+          <p:nvPr/>
+        </p:nvPicPr>
+        <p:blipFill>
+          <a:blip r:embed="rId2"/>
+          <a:srcRect l="8008" t="6731" r="8008" b="6731"/>
+          <a:stretch>
+            <a:fillRect/>
+          </a:stretch>
+        </p:blipFill>
+        <p:spPr>
+          <a:xfrm>
+            <a:off x="0" y="-2"/>
+            <a:ext cx="12192000" cy="6858001"/>
+          </a:xfrm>
+          <a:prstGeom prst="rect">
+            <a:avLst/>
+          </a:prstGeom>
+        </p:spPr>
+      </p:pic>
+      <p:pic>
+        <p:nvPicPr>
+          <p:cNvPr id="5" name="グラフィックス 4" descr="しぶき">
+            <a:extLst>
+              <a:ext uri="{FF2B5EF4-FFF2-40B4-BE49-F238E27FC236}">
+                <a16:creationId xmlns:a16="http://schemas.microsoft.com/office/drawing/2014/main" id="{6DD14828-8AC5-C338-2651-E6721430B523}"/>
+              </a:ext>
+            </a:extLst>
+          </p:cNvPr>
+          <p:cNvPicPr>
+            <a:picLocks noChangeAspect="1"/>
+          </p:cNvPicPr>
+          <p:nvPr/>
+        </p:nvPicPr>
+        <p:blipFill>
+          <a:blip>
+            <a:extLst>
+              <a:ext uri="{96DAC541-7B7A-43D3-8B79-37D633B846F1}">
+                <asvg:svgBlip xmlns:asvg="http://schemas.microsoft.com/office/drawing/2016/SVG/main" r:embed="rId3"/>
+              </a:ext>
+            </a:extLst>
+          </a:blip>
+          <a:stretch>
+            <a:fillRect/>
+          </a:stretch>
+        </p:blipFill>
+        <p:spPr>
+          <a:xfrm>
+            <a:off x="0" y="-2"/>
+            <a:ext cx="2092751" cy="2092751"/>
+          </a:xfrm>
+          <a:prstGeom prst="rect">
+            <a:avLst/>
+          </a:prstGeom>
+          <a:effectLst>
+            <a:glow rad="317500">
+              <a:schemeClr val="bg1"/>
+            </a:glow>
+          </a:effectLst>
+        </p:spPr>
+      </p:pic>
+      <p:sp>
+        <p:nvSpPr>
+          <p:cNvPr id="7" name="正方形/長方形 6">
+            <a:extLst>
+              <a:ext uri="{FF2B5EF4-FFF2-40B4-BE49-F238E27FC236}">
+                <a16:creationId xmlns:a16="http://schemas.microsoft.com/office/drawing/2014/main" id="{AD2C023D-CB25-62D6-D62A-CACDF01FBCDA}"/>
+              </a:ext>
+            </a:extLst>
+          </p:cNvPr>
+          <p:cNvSpPr/>
+          <p:nvPr/>
+        </p:nvSpPr>
+        <p:spPr>
+          <a:xfrm>
+            <a:off x="301477" y="509292"/>
+            <a:ext cx="3582548" cy="1065455"/>
+          </a:xfrm>
+          <a:prstGeom prst="rect">
+            <a:avLst/>
+          </a:prstGeom>
+          <a:noFill/>
+          <a:ln>
+            <a:noFill/>
+          </a:ln>
+        </p:spPr>
+        <p:style>
+          <a:lnRef idx="2">
+            <a:schemeClr val="accent1">
+              <a:shade val="15000"/>
+            </a:schemeClr>
+          </a:lnRef>
+          <a:fillRef idx="1">
+            <a:schemeClr val="accent1"/>
+          </a:fillRef>
+          <a:effectRef idx="0">
+            <a:schemeClr val="accent1"/>
+          </a:effectRef>
+          <a:fontRef idx="minor">
+            <a:schemeClr val="lt1"/>
+          </a:fontRef>
+        </p:style>
+        <p:txBody>
+          <a:bodyPr rtlCol="0" anchor="ctr"/>
+          <a:lstStyle/>
+          <a:p>
+            <a:pPr algn="ctr"/>
+            <a:r>
+              <a:rPr lang="ja-JP" altLang="en-US" sz="6000" b="1" dirty="0">
+                <a:solidFill>
+                  <a:schemeClr val="bg1"/>
+                </a:solidFill>
+                <a:effectLst>
+                  <a:glow rad="317500">
+                    <a:schemeClr val="tx1"/>
+                  </a:glow>
+                </a:effectLst>
+                <a:latin typeface="HGS明朝B" panose="02020800000000000000" pitchFamily="18" charset="-128"/>
+                <a:ea typeface="HGS明朝B" panose="02020800000000000000" pitchFamily="18" charset="-128"/>
+              </a:rPr>
+              <a:t>短編怪談</a:t>
+            </a:r>
+            <a:endParaRPr kumimoji="1" lang="ja-JP" altLang="en-US" sz="2800" b="1" dirty="0">
+              <a:solidFill>
+                <a:schemeClr val="bg1"/>
+              </a:solidFill>
+              <a:effectLst>
+                <a:glow rad="317500">
+                  <a:schemeClr val="tx1"/>
+                </a:glow>
+              </a:effectLst>
+              <a:latin typeface="HGS明朝B" panose="02020800000000000000" pitchFamily="18" charset="-128"/>
+              <a:ea typeface="HGS明朝B" panose="02020800000000000000" pitchFamily="18" charset="-128"/>
+            </a:endParaRPr>
+          </a:p>
+        </p:txBody>
+      </p:sp>
       <p:sp>
         <p:nvSpPr>
           <p:cNvPr id="9" name="正方形/長方形 8">
@@ -4545,7 +4874,7 @@
                   </a:glow>
                 </a:effectLst>
               </a:rPr>
-              <a:t>家</a:t>
+              <a:t>私</a:t>
             </a:r>
             <a:r>
               <a:rPr lang="ja-JP" altLang="en-US" sz="12500" b="1" spc="-2000" dirty="0">
@@ -4566,7 +4895,7 @@
                   </a:glow>
                 </a:effectLst>
               </a:rPr>
-              <a:t>の</a:t>
+              <a:t>も</a:t>
             </a:r>
             <a:r>
               <a:rPr lang="ja-JP" altLang="en-US" sz="15000" b="1" spc="-2000" dirty="0">
@@ -4587,7 +4916,7 @@
                   </a:glow>
                 </a:effectLst>
               </a:rPr>
-              <a:t>中</a:t>
+              <a:t>家</a:t>
             </a:r>
             <a:r>
               <a:rPr lang="ja-JP" altLang="en-US" sz="12500" b="1" spc="-2000" dirty="0">
@@ -4650,28 +4979,7 @@
                   </a:glow>
                 </a:effectLst>
               </a:rPr>
-              <a:t>れて</a:t>
-            </a:r>
-            <a:r>
-              <a:rPr lang="ja-JP" altLang="en-US" sz="15000" b="1" spc="-2000" dirty="0">
-                <a:gradFill>
-                  <a:gsLst>
-                    <a:gs pos="0">
-                      <a:srgbClr val="FF0000"/>
-                    </a:gs>
-                    <a:gs pos="100000">
-                      <a:srgbClr val="000000"/>
-                    </a:gs>
-                  </a:gsLst>
-                  <a:lin ang="5400000" scaled="1"/>
-                </a:gradFill>
-                <a:effectLst>
-                  <a:glow rad="317500">
-                    <a:schemeClr val="tx1"/>
-                  </a:glow>
-                </a:effectLst>
-              </a:rPr>
-              <a:t>？</a:t>
+              <a:t>れて？</a:t>
             </a:r>
             <a:endParaRPr lang="en-US" altLang="ja-JP" sz="15000" b="1" spc="-2000" dirty="0">
               <a:solidFill>
@@ -4690,187 +4998,6 @@
     <p:extLst>
       <p:ext uri="{BB962C8B-B14F-4D97-AF65-F5344CB8AC3E}">
         <p14:creationId xmlns:p14="http://schemas.microsoft.com/office/powerpoint/2010/main" val="3061014281"/>
-      </p:ext>
-    </p:extLst>
-  </p:cSld>
-  <p:clrMapOvr>
-    <a:masterClrMapping/>
-  </p:clrMapOvr>
-</p:sld>
-</file>
-
-<file path=ppt/slides/slide3.xml><?xml version="1.0" encoding="utf-8"?>
-<p:sld xmlns:a="http://schemas.openxmlformats.org/drawingml/2006/main" xmlns:r="http://schemas.openxmlformats.org/officeDocument/2006/relationships" xmlns:p="http://schemas.openxmlformats.org/presentationml/2006/main">
-  <p:cSld>
-    <p:spTree>
-      <p:nvGrpSpPr>
-        <p:cNvPr id="1" name="">
-          <a:extLst>
-            <a:ext uri="{FF2B5EF4-FFF2-40B4-BE49-F238E27FC236}">
-              <a16:creationId xmlns:a16="http://schemas.microsoft.com/office/drawing/2014/main" id="{29997A6A-0C76-521E-3B8B-3B40CBAB9D8C}"/>
-            </a:ext>
-          </a:extLst>
-        </p:cNvPr>
-        <p:cNvGrpSpPr/>
-        <p:nvPr/>
-      </p:nvGrpSpPr>
-      <p:grpSpPr>
-        <a:xfrm>
-          <a:off x="0" y="0"/>
-          <a:ext cx="0" cy="0"/>
-          <a:chOff x="0" y="0"/>
-          <a:chExt cx="0" cy="0"/>
-        </a:xfrm>
-      </p:grpSpPr>
-      <p:sp>
-        <p:nvSpPr>
-          <p:cNvPr id="5" name="正方形/長方形 4">
-            <a:extLst>
-              <a:ext uri="{FF2B5EF4-FFF2-40B4-BE49-F238E27FC236}">
-                <a16:creationId xmlns:a16="http://schemas.microsoft.com/office/drawing/2014/main" id="{C2F83F9E-EC1C-D2D9-6E2E-004D3D231C85}"/>
-              </a:ext>
-            </a:extLst>
-          </p:cNvPr>
-          <p:cNvSpPr>
-            <a:spLocks/>
-          </p:cNvSpPr>
-          <p:nvPr/>
-        </p:nvSpPr>
-        <p:spPr>
-          <a:xfrm flipH="1">
-            <a:off x="-1" y="4214948"/>
-            <a:ext cx="12191999" cy="2643051"/>
-          </a:xfrm>
-          <a:prstGeom prst="rect">
-            <a:avLst/>
-          </a:prstGeom>
-          <a:noFill/>
-          <a:ln>
-            <a:noFill/>
-          </a:ln>
-        </p:spPr>
-        <p:style>
-          <a:lnRef idx="2">
-            <a:schemeClr val="accent1">
-              <a:shade val="15000"/>
-            </a:schemeClr>
-          </a:lnRef>
-          <a:fillRef idx="1">
-            <a:schemeClr val="accent1"/>
-          </a:fillRef>
-          <a:effectRef idx="0">
-            <a:schemeClr val="accent1"/>
-          </a:effectRef>
-          <a:fontRef idx="minor">
-            <a:schemeClr val="lt1"/>
-          </a:fontRef>
-        </p:style>
-        <p:txBody>
-          <a:bodyPr rtlCol="0" anchor="ctr"/>
-          <a:lstStyle/>
-          <a:p>
-            <a:pPr algn="ctr"/>
-            <a:r>
-              <a:rPr lang="ja-JP" altLang="en-US" sz="15000" b="1" spc="-2000" dirty="0">
-                <a:gradFill>
-                  <a:gsLst>
-                    <a:gs pos="0">
-                      <a:srgbClr val="FF0000"/>
-                    </a:gs>
-                    <a:gs pos="100000">
-                      <a:srgbClr val="000000"/>
-                    </a:gs>
-                  </a:gsLst>
-                  <a:lin ang="5400000" scaled="1"/>
-                </a:gradFill>
-                <a:effectLst>
-                  <a:glow rad="317500">
-                    <a:schemeClr val="tx1"/>
-                  </a:glow>
-                </a:effectLst>
-              </a:rPr>
-              <a:t>捕</a:t>
-            </a:r>
-            <a:r>
-              <a:rPr lang="ja-JP" altLang="en-US" sz="12500" b="1" spc="-2000" dirty="0">
-                <a:gradFill>
-                  <a:gsLst>
-                    <a:gs pos="0">
-                      <a:srgbClr val="FF0000"/>
-                    </a:gs>
-                    <a:gs pos="100000">
-                      <a:srgbClr val="000000"/>
-                    </a:gs>
-                  </a:gsLst>
-                  <a:lin ang="5400000" scaled="1"/>
-                </a:gradFill>
-                <a:effectLst>
-                  <a:glow rad="317500">
-                    <a:schemeClr val="tx1"/>
-                  </a:glow>
-                </a:effectLst>
-              </a:rPr>
-              <a:t>まったら</a:t>
-            </a:r>
-            <a:r>
-              <a:rPr lang="ja-JP" altLang="en-US" sz="15000" b="1" spc="-2000" dirty="0">
-                <a:gradFill>
-                  <a:gsLst>
-                    <a:gs pos="0">
-                      <a:srgbClr val="FF0000"/>
-                    </a:gs>
-                    <a:gs pos="100000">
-                      <a:srgbClr val="000000"/>
-                    </a:gs>
-                  </a:gsLst>
-                  <a:lin ang="5400000" scaled="1"/>
-                </a:gradFill>
-                <a:effectLst>
-                  <a:glow rad="317500">
-                    <a:schemeClr val="tx1"/>
-                  </a:glow>
-                </a:effectLst>
-              </a:rPr>
-              <a:t>終</a:t>
-            </a:r>
-            <a:r>
-              <a:rPr lang="ja-JP" altLang="en-US" sz="12500" b="1" spc="-2000" dirty="0">
-                <a:gradFill>
-                  <a:gsLst>
-                    <a:gs pos="0">
-                      <a:srgbClr val="FF0000"/>
-                    </a:gs>
-                    <a:gs pos="100000">
-                      <a:srgbClr val="000000"/>
-                    </a:gs>
-                  </a:gsLst>
-                  <a:lin ang="5400000" scaled="1"/>
-                </a:gradFill>
-                <a:effectLst>
-                  <a:glow rad="317500">
-                    <a:schemeClr val="tx1"/>
-                  </a:glow>
-                </a:effectLst>
-              </a:rPr>
-              <a:t>わり</a:t>
-            </a:r>
-            <a:endParaRPr lang="en-US" altLang="ja-JP" sz="15000" b="1" spc="-2000" dirty="0">
-              <a:solidFill>
-                <a:schemeClr val="bg1"/>
-              </a:solidFill>
-              <a:effectLst>
-                <a:glow rad="317500">
-                  <a:schemeClr val="tx1"/>
-                </a:glow>
-              </a:effectLst>
-            </a:endParaRPr>
-          </a:p>
-        </p:txBody>
-      </p:sp>
-    </p:spTree>
-    <p:extLst>
-      <p:ext uri="{BB962C8B-B14F-4D97-AF65-F5344CB8AC3E}">
-        <p14:creationId xmlns:p14="http://schemas.microsoft.com/office/powerpoint/2010/main" val="2538605898"/>
       </p:ext>
     </p:extLst>
   </p:cSld>
